--- a/deliverables/Spatial_Audio_Presentation.pptx
+++ b/deliverables/Spatial_Audio_Presentation.pptx
@@ -305,7 +305,8 @@
           <a:lstStyle/>
           <a:p>
             <a:r>
-              <a:t>Good morning. We are presenting Project 4: Spatial Audio and High-Fidelity Streaming. We compare three perceptual codecs - MP3, AAC and Opus - for low-latency binaural delivery and demonstrate a working spatial audio web player. I'll keep us to five minutes. [10 seconds]</a:t>
+              <a:rPr dirty="0"/>
+              <a:t>We are presenting Project 4: Spatial Audio and High-Fidelity Streaming. We compare three perceptual codecs - MP3, AAC and Opus - for low-latency binaural delivery and demonstrate a working spatial audio web player. I'll keep us to five minutes. [10 seconds]</a:t>
             </a:r>
           </a:p>
         </p:txBody>
@@ -445,6 +446,7 @@
           <a:lstStyle/>
           <a:p>
             <a:r>
+              <a:rPr dirty="0"/>
               <a:t>Modern streaming spends most of its budget on video. Audio gets the leftover. That's a problem for spatial audio because the cues that tell our brain where a sound is coming from - the inter-aural time and level differences - sit precisely in the high-frequency and transient detail that aggressive compression discards first. So our central question is simple: which codec converts the smallest bitrate into the most directional clarity? [35 seconds]</a:t>
             </a:r>
           </a:p>
@@ -4357,7 +4359,7 @@
         <p:spPr>
           <a:xfrm>
             <a:off x="1554480" y="4937760"/>
-            <a:ext cx="9144000" cy="365760"/>
+            <a:ext cx="9144000" cy="184666"/>
           </a:xfrm>
           <a:prstGeom prst="rect">
             <a:avLst/>
@@ -4376,13 +4378,37 @@
               </a:spcAft>
             </a:pPr>
             <a:r>
-              <a:rPr sz="1200" b="0" i="0">
+              <a:rPr sz="1200" b="0" i="0" dirty="0">
                 <a:solidFill>
                   <a:srgbClr val="525B6E"/>
                 </a:solidFill>
-                <a:latin typeface="Roboto"/>
-              </a:rPr>
-              <a:t>Yuwadee Tongkong  ·  Vanodhya Warnasooriya  ·  Chanakan Hambleton</a:t>
+                <a:latin typeface="Google Sans" pitchFamily="2" charset="0"/>
+                <a:ea typeface="Google Sans" pitchFamily="2" charset="0"/>
+                <a:cs typeface="Google Sans" pitchFamily="2" charset="0"/>
+              </a:rPr>
+              <a:t>Yuwadee Tongkong  ·  Vanodhya Warnasooriya  ·  </a:t>
+            </a:r>
+            <a:r>
+              <a:rPr sz="1200" b="0" i="0" dirty="0" err="1">
+                <a:solidFill>
+                  <a:srgbClr val="525B6E"/>
+                </a:solidFill>
+                <a:latin typeface="Google Sans" pitchFamily="2" charset="0"/>
+                <a:ea typeface="Google Sans" pitchFamily="2" charset="0"/>
+                <a:cs typeface="Google Sans" pitchFamily="2" charset="0"/>
+              </a:rPr>
+              <a:t>Chanakan</a:t>
+            </a:r>
+            <a:r>
+              <a:rPr sz="1200" b="0" i="0" dirty="0">
+                <a:solidFill>
+                  <a:srgbClr val="525B6E"/>
+                </a:solidFill>
+                <a:latin typeface="Google Sans" pitchFamily="2" charset="0"/>
+                <a:ea typeface="Google Sans" pitchFamily="2" charset="0"/>
+                <a:cs typeface="Google Sans" pitchFamily="2" charset="0"/>
+              </a:rPr>
+              <a:t> Hambleton</a:t>
             </a:r>
           </a:p>
         </p:txBody>
@@ -4598,8 +4624,8 @@
         </p:nvSpPr>
         <p:spPr>
           <a:xfrm>
-            <a:off x="1645920" y="1920240"/>
-            <a:ext cx="9144000" cy="1097280"/>
+            <a:off x="1645920" y="2674204"/>
+            <a:ext cx="9144000" cy="997528"/>
           </a:xfrm>
           <a:prstGeom prst="rect">
             <a:avLst/>
@@ -4618,52 +4644,13 @@
               </a:spcAft>
             </a:pPr>
             <a:r>
-              <a:rPr sz="6400" b="1" i="0">
+              <a:rPr sz="6400" b="1" i="0" dirty="0">
                 <a:solidFill>
                   <a:srgbClr val="1F2433"/>
                 </a:solidFill>
                 <a:latin typeface="Google Sans"/>
               </a:rPr>
               <a:t>Thank you</a:t>
-            </a:r>
-          </a:p>
-        </p:txBody>
-      </p:sp>
-      <p:sp>
-        <p:nvSpPr>
-          <p:cNvPr id="4" name="TextBox 3"/>
-          <p:cNvSpPr txBox="1"/>
-          <p:nvPr/>
-        </p:nvSpPr>
-        <p:spPr>
-          <a:xfrm>
-            <a:off x="1645920" y="3108960"/>
-            <a:ext cx="9144000" cy="548640"/>
-          </a:xfrm>
-          <a:prstGeom prst="rect">
-            <a:avLst/>
-          </a:prstGeom>
-          <a:noFill/>
-        </p:spPr>
-        <p:txBody>
-          <a:bodyPr wrap="square" lIns="0" tIns="0" rIns="0" bIns="0" anchor="t">
-            <a:spAutoFit/>
-          </a:bodyPr>
-          <a:lstStyle/>
-          <a:p>
-            <a:pPr algn="ctr">
-              <a:spcAft>
-                <a:spcPts val="200"/>
-              </a:spcAft>
-            </a:pPr>
-            <a:r>
-              <a:rPr sz="2000" b="0" i="1">
-                <a:solidFill>
-                  <a:srgbClr val="525B6E"/>
-                </a:solidFill>
-                <a:latin typeface="Roboto"/>
-              </a:rPr>
-              <a:t>Questions?</a:t>
             </a:r>
           </a:p>
         </p:txBody>
@@ -4676,7 +4663,7 @@
         </p:nvSpPr>
         <p:spPr>
           <a:xfrm>
-            <a:off x="5212080" y="4114800"/>
+            <a:off x="5212080" y="3749040"/>
             <a:ext cx="365760" cy="365760"/>
           </a:xfrm>
           <a:prstGeom prst="ellipse">
@@ -4727,7 +4714,7 @@
         </p:nvSpPr>
         <p:spPr>
           <a:xfrm>
-            <a:off x="5669280" y="4114800"/>
+            <a:off x="5669280" y="3749040"/>
             <a:ext cx="365760" cy="365760"/>
           </a:xfrm>
           <a:prstGeom prst="ellipse">
@@ -4778,7 +4765,7 @@
         </p:nvSpPr>
         <p:spPr>
           <a:xfrm>
-            <a:off x="6126480" y="4114800"/>
+            <a:off x="6126480" y="3749040"/>
             <a:ext cx="365760" cy="365760"/>
           </a:xfrm>
           <a:prstGeom prst="ellipse">
@@ -4829,7 +4816,7 @@
         </p:nvSpPr>
         <p:spPr>
           <a:xfrm>
-            <a:off x="6583680" y="4114800"/>
+            <a:off x="6583680" y="3749040"/>
             <a:ext cx="365760" cy="365760"/>
           </a:xfrm>
           <a:prstGeom prst="ellipse">
@@ -4880,8 +4867,8 @@
         </p:nvSpPr>
         <p:spPr>
           <a:xfrm>
-            <a:off x="1645920" y="4846320"/>
-            <a:ext cx="9144000" cy="457200"/>
+            <a:off x="1645920" y="4791456"/>
+            <a:ext cx="9144000" cy="215444"/>
           </a:xfrm>
           <a:prstGeom prst="rect">
             <a:avLst/>
@@ -4900,14 +4887,20 @@
               </a:spcAft>
             </a:pPr>
             <a:r>
-              <a:rPr sz="1400" b="0" i="1">
+              <a:rPr lang="en-US" sz="1400" b="0" i="1" dirty="0">
                 <a:solidFill>
                   <a:srgbClr val="4285F4"/>
                 </a:solidFill>
                 <a:latin typeface="Roboto"/>
               </a:rPr>
-              <a:t>vanowarna.com/spatial-audio-and-high-fidelity-streaming</a:t>
-            </a:r>
+              <a:t>https://vanowarna.com/spatial-audio-and-high-fidelity-streaming/</a:t>
+            </a:r>
+            <a:endParaRPr sz="1400" b="0" i="1" dirty="0">
+              <a:solidFill>
+                <a:srgbClr val="4285F4"/>
+              </a:solidFill>
+              <a:latin typeface="Roboto"/>
+            </a:endParaRPr>
           </a:p>
         </p:txBody>
       </p:sp>
@@ -4952,14 +4945,20 @@
       </p:sp>
       <p:sp>
         <p:nvSpPr>
-          <p:cNvPr id="11" name="TextBox 10"/>
+          <p:cNvPr id="12" name="TextBox 11">
+            <a:extLst>
+              <a:ext uri="{FF2B5EF4-FFF2-40B4-BE49-F238E27FC236}">
+                <a16:creationId xmlns:a16="http://schemas.microsoft.com/office/drawing/2014/main" id="{43919835-4E13-BDB7-D742-0FB954A501C3}"/>
+              </a:ext>
+            </a:extLst>
+          </p:cNvPr>
           <p:cNvSpPr txBox="1"/>
           <p:nvPr/>
         </p:nvSpPr>
         <p:spPr>
           <a:xfrm>
-            <a:off x="10698480" y="6446520"/>
-            <a:ext cx="1554480" cy="274320"/>
+            <a:off x="10561320" y="6620256"/>
+            <a:ext cx="1554480" cy="153888"/>
           </a:xfrm>
           <a:prstGeom prst="rect">
             <a:avLst/>
@@ -4978,13 +4977,22 @@
               </a:spcAft>
             </a:pPr>
             <a:r>
-              <a:rPr sz="1000" b="0" i="0">
+              <a:rPr lang="en-US" sz="1000" dirty="0">
                 <a:solidFill>
                   <a:srgbClr val="8C96A8"/>
                 </a:solidFill>
                 <a:latin typeface="Roboto"/>
               </a:rPr>
-              <a:t>10 / 10</a:t>
+              <a:t>10</a:t>
+            </a:r>
+            <a:r>
+              <a:rPr sz="1000" b="0" i="0" dirty="0">
+                <a:solidFill>
+                  <a:srgbClr val="8C96A8"/>
+                </a:solidFill>
+                <a:latin typeface="Roboto"/>
+              </a:rPr>
+              <a:t> / 10</a:t>
             </a:r>
           </a:p>
         </p:txBody>
@@ -5874,14 +5882,20 @@
       </p:sp>
       <p:sp>
         <p:nvSpPr>
-          <p:cNvPr id="21" name="TextBox 20"/>
+          <p:cNvPr id="22" name="TextBox 21">
+            <a:extLst>
+              <a:ext uri="{FF2B5EF4-FFF2-40B4-BE49-F238E27FC236}">
+                <a16:creationId xmlns:a16="http://schemas.microsoft.com/office/drawing/2014/main" id="{D0957291-47DC-FD31-9866-211D066FAE15}"/>
+              </a:ext>
+            </a:extLst>
+          </p:cNvPr>
           <p:cNvSpPr txBox="1"/>
           <p:nvPr/>
         </p:nvSpPr>
         <p:spPr>
           <a:xfrm>
-            <a:off x="10698480" y="6446520"/>
-            <a:ext cx="1554480" cy="274320"/>
+            <a:off x="10561320" y="6620256"/>
+            <a:ext cx="1554480" cy="153888"/>
           </a:xfrm>
           <a:prstGeom prst="rect">
             <a:avLst/>
@@ -5900,13 +5914,22 @@
               </a:spcAft>
             </a:pPr>
             <a:r>
-              <a:rPr sz="1000" b="0" i="0">
+              <a:rPr lang="en-US" sz="1000" b="0" i="0" dirty="0">
                 <a:solidFill>
                   <a:srgbClr val="8C96A8"/>
                 </a:solidFill>
                 <a:latin typeface="Roboto"/>
               </a:rPr>
-              <a:t>2 / 10</a:t>
+              <a:t>2</a:t>
+            </a:r>
+            <a:r>
+              <a:rPr sz="1000" b="0" i="0" dirty="0">
+                <a:solidFill>
+                  <a:srgbClr val="8C96A8"/>
+                </a:solidFill>
+                <a:latin typeface="Roboto"/>
+              </a:rPr>
+              <a:t> / 10</a:t>
             </a:r>
           </a:p>
         </p:txBody>
@@ -6039,7 +6062,7 @@
             </a:avLst>
           </a:prstGeom>
           <a:solidFill>
-            <a:srgbClr val="E6EAF0"/>
+            <a:schemeClr val="bg1"/>
           </a:solidFill>
           <a:ln>
             <a:noFill/>
@@ -6083,7 +6106,7 @@
         </p:nvSpPr>
         <p:spPr>
           <a:xfrm>
-            <a:off x="868680" y="1874520"/>
+            <a:off x="868680" y="2176272"/>
             <a:ext cx="822960" cy="822960"/>
           </a:xfrm>
           <a:prstGeom prst="ellipse">
@@ -6142,7 +6165,7 @@
         </p:nvSpPr>
         <p:spPr>
           <a:xfrm>
-            <a:off x="1920240" y="1965960"/>
+            <a:off x="1920240" y="2267712"/>
             <a:ext cx="4114800" cy="502920"/>
           </a:xfrm>
           <a:prstGeom prst="rect">
@@ -6181,7 +6204,7 @@
         </p:nvSpPr>
         <p:spPr>
           <a:xfrm>
-            <a:off x="1920240" y="2468880"/>
+            <a:off x="1920240" y="2633472"/>
             <a:ext cx="4114800" cy="914400"/>
           </a:xfrm>
           <a:prstGeom prst="rect">
@@ -6201,7 +6224,7 @@
               </a:spcAft>
             </a:pPr>
             <a:r>
-              <a:rPr sz="1400" b="0" i="0">
+              <a:rPr sz="1400" b="0" i="0" dirty="0">
                 <a:solidFill>
                   <a:srgbClr val="525B6E"/>
                 </a:solidFill>
@@ -6229,7 +6252,7 @@
             </a:avLst>
           </a:prstGeom>
           <a:solidFill>
-            <a:srgbClr val="E6EAF0"/>
+            <a:schemeClr val="bg1"/>
           </a:solidFill>
           <a:ln>
             <a:noFill/>
@@ -6273,7 +6296,7 @@
         </p:nvSpPr>
         <p:spPr>
           <a:xfrm>
-            <a:off x="6537960" y="1874520"/>
+            <a:off x="6537960" y="2176272"/>
             <a:ext cx="822960" cy="822960"/>
           </a:xfrm>
           <a:prstGeom prst="ellipse">
@@ -6332,7 +6355,7 @@
         </p:nvSpPr>
         <p:spPr>
           <a:xfrm>
-            <a:off x="7589520" y="1965960"/>
+            <a:off x="7589520" y="2267712"/>
             <a:ext cx="4114800" cy="502920"/>
           </a:xfrm>
           <a:prstGeom prst="rect">
@@ -6371,7 +6394,7 @@
         </p:nvSpPr>
         <p:spPr>
           <a:xfrm>
-            <a:off x="7589520" y="2468880"/>
+            <a:off x="7589520" y="2633472"/>
             <a:ext cx="4114800" cy="914400"/>
           </a:xfrm>
           <a:prstGeom prst="rect">
@@ -6391,7 +6414,7 @@
               </a:spcAft>
             </a:pPr>
             <a:r>
-              <a:rPr sz="1400" b="0" i="0">
+              <a:rPr sz="1400" b="0" i="0" dirty="0">
                 <a:solidFill>
                   <a:srgbClr val="525B6E"/>
                 </a:solidFill>
@@ -6419,7 +6442,7 @@
             </a:avLst>
           </a:prstGeom>
           <a:solidFill>
-            <a:srgbClr val="E6EAF0"/>
+            <a:schemeClr val="bg1"/>
           </a:solidFill>
           <a:ln>
             <a:noFill/>
@@ -6463,7 +6486,7 @@
         </p:nvSpPr>
         <p:spPr>
           <a:xfrm>
-            <a:off x="868680" y="4069079"/>
+            <a:off x="868680" y="4370831"/>
             <a:ext cx="822960" cy="822960"/>
           </a:xfrm>
           <a:prstGeom prst="ellipse">
@@ -6522,7 +6545,7 @@
         </p:nvSpPr>
         <p:spPr>
           <a:xfrm>
-            <a:off x="1920240" y="4160519"/>
+            <a:off x="1920240" y="4462271"/>
             <a:ext cx="4114800" cy="502920"/>
           </a:xfrm>
           <a:prstGeom prst="rect">
@@ -6561,7 +6584,7 @@
         </p:nvSpPr>
         <p:spPr>
           <a:xfrm>
-            <a:off x="1920240" y="4663439"/>
+            <a:off x="1920240" y="4828031"/>
             <a:ext cx="4114800" cy="914400"/>
           </a:xfrm>
           <a:prstGeom prst="rect">
@@ -6581,7 +6604,7 @@
               </a:spcAft>
             </a:pPr>
             <a:r>
-              <a:rPr sz="1400" b="0" i="0">
+              <a:rPr sz="1400" b="0" i="0" dirty="0">
                 <a:solidFill>
                   <a:srgbClr val="525B6E"/>
                 </a:solidFill>
@@ -6609,7 +6632,7 @@
             </a:avLst>
           </a:prstGeom>
           <a:solidFill>
-            <a:srgbClr val="E6EAF0"/>
+            <a:schemeClr val="bg1"/>
           </a:solidFill>
           <a:ln>
             <a:noFill/>
@@ -6653,7 +6676,7 @@
         </p:nvSpPr>
         <p:spPr>
           <a:xfrm>
-            <a:off x="6537960" y="4069079"/>
+            <a:off x="6537960" y="4370831"/>
             <a:ext cx="822960" cy="822960"/>
           </a:xfrm>
           <a:prstGeom prst="ellipse">
@@ -6712,7 +6735,7 @@
         </p:nvSpPr>
         <p:spPr>
           <a:xfrm>
-            <a:off x="7589520" y="4160519"/>
+            <a:off x="7589520" y="4462271"/>
             <a:ext cx="4114800" cy="502920"/>
           </a:xfrm>
           <a:prstGeom prst="rect">
@@ -6751,7 +6774,7 @@
         </p:nvSpPr>
         <p:spPr>
           <a:xfrm>
-            <a:off x="7589520" y="4663439"/>
+            <a:off x="7589520" y="4828031"/>
             <a:ext cx="4114800" cy="914400"/>
           </a:xfrm>
           <a:prstGeom prst="rect">
@@ -6771,7 +6794,7 @@
               </a:spcAft>
             </a:pPr>
             <a:r>
-              <a:rPr sz="1400" b="0" i="0">
+              <a:rPr sz="1400" b="0" i="0" dirty="0">
                 <a:solidFill>
                   <a:srgbClr val="525B6E"/>
                 </a:solidFill>
@@ -6823,14 +6846,20 @@
       </p:sp>
       <p:sp>
         <p:nvSpPr>
-          <p:cNvPr id="21" name="TextBox 20"/>
+          <p:cNvPr id="22" name="TextBox 21">
+            <a:extLst>
+              <a:ext uri="{FF2B5EF4-FFF2-40B4-BE49-F238E27FC236}">
+                <a16:creationId xmlns:a16="http://schemas.microsoft.com/office/drawing/2014/main" id="{7EF08BA9-BD3B-5C3B-06B7-E304BABBE0BB}"/>
+              </a:ext>
+            </a:extLst>
+          </p:cNvPr>
           <p:cNvSpPr txBox="1"/>
           <p:nvPr/>
         </p:nvSpPr>
         <p:spPr>
           <a:xfrm>
-            <a:off x="10698480" y="6446520"/>
-            <a:ext cx="1554480" cy="274320"/>
+            <a:off x="10561320" y="6620256"/>
+            <a:ext cx="1554480" cy="153888"/>
           </a:xfrm>
           <a:prstGeom prst="rect">
             <a:avLst/>
@@ -6849,13 +6878,22 @@
               </a:spcAft>
             </a:pPr>
             <a:r>
-              <a:rPr sz="1000" b="0" i="0">
+              <a:rPr lang="en-US" sz="1000" b="0" i="0" dirty="0">
                 <a:solidFill>
                   <a:srgbClr val="8C96A8"/>
                 </a:solidFill>
                 <a:latin typeface="Roboto"/>
               </a:rPr>
-              <a:t>3 / 10</a:t>
+              <a:t>3</a:t>
+            </a:r>
+            <a:r>
+              <a:rPr sz="1000" b="0" i="0" dirty="0">
+                <a:solidFill>
+                  <a:srgbClr val="8C96A8"/>
+                </a:solidFill>
+                <a:latin typeface="Roboto"/>
+              </a:rPr>
+              <a:t> / 10</a:t>
             </a:r>
           </a:p>
         </p:txBody>
@@ -6979,8 +7017,8 @@
         </p:nvSpPr>
         <p:spPr>
           <a:xfrm>
-            <a:off x="548640" y="1645920"/>
-            <a:ext cx="2670048" cy="2286000"/>
+            <a:off x="548640" y="2520510"/>
+            <a:ext cx="2670048" cy="1411410"/>
           </a:xfrm>
           <a:prstGeom prst="roundRect">
             <a:avLst>
@@ -6988,7 +7026,7 @@
             </a:avLst>
           </a:prstGeom>
           <a:solidFill>
-            <a:srgbClr val="E6EAF0"/>
+            <a:schemeClr val="bg1"/>
           </a:solidFill>
           <a:ln>
             <a:noFill/>
@@ -7032,7 +7070,7 @@
         </p:nvSpPr>
         <p:spPr>
           <a:xfrm>
-            <a:off x="777240" y="1874519"/>
+            <a:off x="777240" y="2674619"/>
             <a:ext cx="457200" cy="457200"/>
           </a:xfrm>
           <a:prstGeom prst="ellipse">
@@ -7083,7 +7121,7 @@
         </p:nvSpPr>
         <p:spPr>
           <a:xfrm>
-            <a:off x="777240" y="2468880"/>
+            <a:off x="777240" y="3268980"/>
             <a:ext cx="2377440" cy="411480"/>
           </a:xfrm>
           <a:prstGeom prst="rect">
@@ -7103,7 +7141,7 @@
               </a:spcAft>
             </a:pPr>
             <a:r>
-              <a:rPr sz="1600" b="1" i="0">
+              <a:rPr sz="1600" b="1" i="0" dirty="0" err="1">
                 <a:solidFill>
                   <a:srgbClr val="1F2433"/>
                 </a:solidFill>
@@ -7111,6 +7149,12 @@
               </a:rPr>
               <a:t>FFmpeg</a:t>
             </a:r>
+            <a:endParaRPr sz="1600" b="1" i="0" dirty="0">
+              <a:solidFill>
+                <a:srgbClr val="1F2433"/>
+              </a:solidFill>
+              <a:latin typeface="Google Sans"/>
+            </a:endParaRPr>
           </a:p>
         </p:txBody>
       </p:sp>
@@ -7122,7 +7166,7 @@
         </p:nvSpPr>
         <p:spPr>
           <a:xfrm>
-            <a:off x="777240" y="2880360"/>
+            <a:off x="777240" y="3526350"/>
             <a:ext cx="2377440" cy="914400"/>
           </a:xfrm>
           <a:prstGeom prst="rect">
@@ -7142,14 +7186,38 @@
               </a:spcAft>
             </a:pPr>
             <a:r>
-              <a:rPr sz="1200" b="0" i="0">
+              <a:rPr sz="1200" b="0" i="0" dirty="0" err="1">
                 <a:solidFill>
                   <a:srgbClr val="525B6E"/>
                 </a:solidFill>
                 <a:latin typeface="Roboto"/>
               </a:rPr>
-              <a:t>libfdk-aac · libmp3lame · libopus</a:t>
-            </a:r>
+              <a:t>libfdk-aac</a:t>
+            </a:r>
+            <a:r>
+              <a:rPr sz="1200" b="0" i="0" dirty="0">
+                <a:solidFill>
+                  <a:srgbClr val="525B6E"/>
+                </a:solidFill>
+                <a:latin typeface="Roboto"/>
+              </a:rPr>
+              <a:t> · libmp3lame · </a:t>
+            </a:r>
+            <a:r>
+              <a:rPr sz="1200" b="0" i="0" dirty="0" err="1">
+                <a:solidFill>
+                  <a:srgbClr val="525B6E"/>
+                </a:solidFill>
+                <a:latin typeface="Roboto"/>
+              </a:rPr>
+              <a:t>libopus</a:t>
+            </a:r>
+            <a:endParaRPr sz="1200" b="0" i="0" dirty="0">
+              <a:solidFill>
+                <a:srgbClr val="525B6E"/>
+              </a:solidFill>
+              <a:latin typeface="Roboto"/>
+            </a:endParaRPr>
           </a:p>
         </p:txBody>
       </p:sp>
@@ -7161,8 +7229,8 @@
         </p:nvSpPr>
         <p:spPr>
           <a:xfrm>
-            <a:off x="3401568" y="1645920"/>
-            <a:ext cx="2670048" cy="2286000"/>
+            <a:off x="3401568" y="2520510"/>
+            <a:ext cx="2670048" cy="1411410"/>
           </a:xfrm>
           <a:prstGeom prst="roundRect">
             <a:avLst>
@@ -7170,7 +7238,7 @@
             </a:avLst>
           </a:prstGeom>
           <a:solidFill>
-            <a:srgbClr val="E6EAF0"/>
+            <a:schemeClr val="bg1"/>
           </a:solidFill>
           <a:ln>
             <a:noFill/>
@@ -7214,7 +7282,7 @@
         </p:nvSpPr>
         <p:spPr>
           <a:xfrm>
-            <a:off x="3630168" y="1874519"/>
+            <a:off x="3630168" y="2674619"/>
             <a:ext cx="457200" cy="457200"/>
           </a:xfrm>
           <a:prstGeom prst="ellipse">
@@ -7265,7 +7333,7 @@
         </p:nvSpPr>
         <p:spPr>
           <a:xfrm>
-            <a:off x="3630168" y="2468880"/>
+            <a:off x="3630168" y="3268980"/>
             <a:ext cx="2377440" cy="411480"/>
           </a:xfrm>
           <a:prstGeom prst="rect">
@@ -7285,7 +7353,7 @@
               </a:spcAft>
             </a:pPr>
             <a:r>
-              <a:rPr sz="1600" b="1" i="0">
+              <a:rPr sz="1600" b="1" i="0" dirty="0">
                 <a:solidFill>
                   <a:srgbClr val="1F2433"/>
                 </a:solidFill>
@@ -7304,7 +7372,7 @@
         </p:nvSpPr>
         <p:spPr>
           <a:xfrm>
-            <a:off x="3630168" y="2880360"/>
+            <a:off x="3630168" y="3526350"/>
             <a:ext cx="2377440" cy="914400"/>
           </a:xfrm>
           <a:prstGeom prst="rect">
@@ -7324,7 +7392,7 @@
               </a:spcAft>
             </a:pPr>
             <a:r>
-              <a:rPr sz="1200" b="0" i="0">
+              <a:rPr sz="1200" b="0" i="0" dirty="0">
                 <a:solidFill>
                   <a:srgbClr val="525B6E"/>
                 </a:solidFill>
@@ -7343,8 +7411,8 @@
         </p:nvSpPr>
         <p:spPr>
           <a:xfrm>
-            <a:off x="6254496" y="1645920"/>
-            <a:ext cx="2670048" cy="2286000"/>
+            <a:off x="6254496" y="2520510"/>
+            <a:ext cx="2670048" cy="1411410"/>
           </a:xfrm>
           <a:prstGeom prst="roundRect">
             <a:avLst>
@@ -7352,7 +7420,7 @@
             </a:avLst>
           </a:prstGeom>
           <a:solidFill>
-            <a:srgbClr val="E6EAF0"/>
+            <a:schemeClr val="bg1"/>
           </a:solidFill>
           <a:ln>
             <a:noFill/>
@@ -7396,7 +7464,7 @@
         </p:nvSpPr>
         <p:spPr>
           <a:xfrm>
-            <a:off x="6483096" y="1874519"/>
+            <a:off x="6483096" y="2674619"/>
             <a:ext cx="457200" cy="457200"/>
           </a:xfrm>
           <a:prstGeom prst="ellipse">
@@ -7447,7 +7515,7 @@
         </p:nvSpPr>
         <p:spPr>
           <a:xfrm>
-            <a:off x="6483096" y="2468880"/>
+            <a:off x="6483096" y="3268980"/>
             <a:ext cx="2377440" cy="411480"/>
           </a:xfrm>
           <a:prstGeom prst="rect">
@@ -7486,7 +7554,7 @@
         </p:nvSpPr>
         <p:spPr>
           <a:xfrm>
-            <a:off x="6483096" y="2880360"/>
+            <a:off x="6483096" y="3526350"/>
             <a:ext cx="2377440" cy="914400"/>
           </a:xfrm>
           <a:prstGeom prst="rect">
@@ -7525,8 +7593,8 @@
         </p:nvSpPr>
         <p:spPr>
           <a:xfrm>
-            <a:off x="9107424" y="1645920"/>
-            <a:ext cx="2670048" cy="2286000"/>
+            <a:off x="9107424" y="2520510"/>
+            <a:ext cx="2670048" cy="1411410"/>
           </a:xfrm>
           <a:prstGeom prst="roundRect">
             <a:avLst>
@@ -7534,7 +7602,7 @@
             </a:avLst>
           </a:prstGeom>
           <a:solidFill>
-            <a:srgbClr val="E6EAF0"/>
+            <a:schemeClr val="bg1"/>
           </a:solidFill>
           <a:ln>
             <a:noFill/>
@@ -7578,7 +7646,7 @@
         </p:nvSpPr>
         <p:spPr>
           <a:xfrm>
-            <a:off x="9336024" y="1874519"/>
+            <a:off x="9336024" y="2674619"/>
             <a:ext cx="457200" cy="457200"/>
           </a:xfrm>
           <a:prstGeom prst="ellipse">
@@ -7629,7 +7697,7 @@
         </p:nvSpPr>
         <p:spPr>
           <a:xfrm>
-            <a:off x="9336024" y="2468880"/>
+            <a:off x="9336024" y="3268980"/>
             <a:ext cx="2377440" cy="411480"/>
           </a:xfrm>
           <a:prstGeom prst="rect">
@@ -7668,7 +7736,7 @@
         </p:nvSpPr>
         <p:spPr>
           <a:xfrm>
-            <a:off x="9336024" y="2880360"/>
+            <a:off x="9336024" y="3526350"/>
             <a:ext cx="2377440" cy="914400"/>
           </a:xfrm>
           <a:prstGeom prst="rect">
@@ -8112,14 +8180,20 @@
       </p:sp>
       <p:sp>
         <p:nvSpPr>
-          <p:cNvPr id="29" name="TextBox 28"/>
+          <p:cNvPr id="30" name="TextBox 29">
+            <a:extLst>
+              <a:ext uri="{FF2B5EF4-FFF2-40B4-BE49-F238E27FC236}">
+                <a16:creationId xmlns:a16="http://schemas.microsoft.com/office/drawing/2014/main" id="{5880E908-00DD-2E57-9E53-4B39B3E8015B}"/>
+              </a:ext>
+            </a:extLst>
+          </p:cNvPr>
           <p:cNvSpPr txBox="1"/>
           <p:nvPr/>
         </p:nvSpPr>
         <p:spPr>
           <a:xfrm>
-            <a:off x="10698480" y="6446520"/>
-            <a:ext cx="1554480" cy="274320"/>
+            <a:off x="10561320" y="6620256"/>
+            <a:ext cx="1554480" cy="153888"/>
           </a:xfrm>
           <a:prstGeom prst="rect">
             <a:avLst/>
@@ -8138,17 +8212,79 @@
               </a:spcAft>
             </a:pPr>
             <a:r>
-              <a:rPr sz="1000" b="0" i="0">
+              <a:rPr lang="en-US" sz="1000" b="0" i="0" dirty="0">
                 <a:solidFill>
                   <a:srgbClr val="8C96A8"/>
                 </a:solidFill>
                 <a:latin typeface="Roboto"/>
               </a:rPr>
-              <a:t>4 / 10</a:t>
-            </a:r>
-          </a:p>
-        </p:txBody>
-      </p:sp>
+              <a:t>4</a:t>
+            </a:r>
+            <a:r>
+              <a:rPr sz="1000" b="0" i="0" dirty="0">
+                <a:solidFill>
+                  <a:srgbClr val="8C96A8"/>
+                </a:solidFill>
+                <a:latin typeface="Roboto"/>
+              </a:rPr>
+              <a:t> / 10</a:t>
+            </a:r>
+          </a:p>
+        </p:txBody>
+      </p:sp>
+      <p:pic>
+        <p:nvPicPr>
+          <p:cNvPr id="31" name="Picture 30">
+            <a:extLst>
+              <a:ext uri="{FF2B5EF4-FFF2-40B4-BE49-F238E27FC236}">
+                <a16:creationId xmlns:a16="http://schemas.microsoft.com/office/drawing/2014/main" id="{74F03C0A-F731-2526-A154-0213379BAB11}"/>
+              </a:ext>
+            </a:extLst>
+          </p:cNvPr>
+          <p:cNvPicPr>
+            <a:picLocks noChangeAspect="1"/>
+          </p:cNvPicPr>
+          <p:nvPr/>
+        </p:nvPicPr>
+        <p:blipFill>
+          <a:blip r:embed="rId3"/>
+          <a:srcRect t="7443" b="7443"/>
+          <a:stretch/>
+        </p:blipFill>
+        <p:spPr>
+          <a:xfrm>
+            <a:off x="6711696" y="258154"/>
+            <a:ext cx="4002607" cy="2075109"/>
+          </a:xfrm>
+          <a:prstGeom prst="roundRect">
+            <a:avLst>
+              <a:gd name="adj" fmla="val 16667"/>
+            </a:avLst>
+          </a:prstGeom>
+          <a:ln>
+            <a:noFill/>
+          </a:ln>
+          <a:effectLst>
+            <a:outerShdw blurRad="76200" dist="38100" dir="7800000" algn="tl" rotWithShape="0">
+              <a:srgbClr val="000000">
+                <a:alpha val="40000"/>
+              </a:srgbClr>
+            </a:outerShdw>
+          </a:effectLst>
+          <a:scene3d>
+            <a:camera prst="orthographicFront"/>
+            <a:lightRig rig="contrasting" dir="t">
+              <a:rot lat="0" lon="0" rev="4200000"/>
+            </a:lightRig>
+          </a:scene3d>
+          <a:sp3d prstMaterial="plastic">
+            <a:bevelT w="381000" h="114300" prst="relaxedInset"/>
+            <a:contourClr>
+              <a:srgbClr val="969696"/>
+            </a:contourClr>
+          </a:sp3d>
+        </p:spPr>
+      </p:pic>
     </p:spTree>
   </p:cSld>
   <p:clrMapOvr>
@@ -8268,16 +8404,79 @@
         </p:nvSpPr>
         <p:spPr>
           <a:xfrm>
-            <a:off x="548640" y="1554480"/>
-            <a:ext cx="6400800" cy="4572000"/>
+            <a:off x="548640" y="1837944"/>
+            <a:ext cx="6268260" cy="3831336"/>
           </a:xfrm>
           <a:prstGeom prst="roundRect">
             <a:avLst>
               <a:gd name="adj" fmla="val 10000"/>
             </a:avLst>
           </a:prstGeom>
+          <a:blipFill dpi="0" rotWithShape="1">
+            <a:blip r:embed="rId3">
+              <a:extLst>
+                <a:ext uri="{28A0092B-C50C-407E-A947-70E740481C1C}">
+                  <a14:useLocalDpi xmlns:a14="http://schemas.microsoft.com/office/drawing/2010/main" val="0"/>
+                </a:ext>
+              </a:extLst>
+            </a:blip>
+            <a:srcRect/>
+            <a:stretch>
+              <a:fillRect/>
+            </a:stretch>
+          </a:blipFill>
+          <a:ln>
+            <a:noFill/>
+          </a:ln>
+          <a:effectLst>
+            <a:outerShdw blurRad="80000" dist="18000" dir="2700000" rotWithShape="0">
+              <a:srgbClr val="BCC4D0">
+                <a:alpha val="42000"/>
+              </a:srgbClr>
+            </a:outerShdw>
+          </a:effectLst>
+        </p:spPr>
+        <p:style>
+          <a:lnRef idx="1">
+            <a:schemeClr val="accent1"/>
+          </a:lnRef>
+          <a:fillRef idx="3">
+            <a:schemeClr val="accent1"/>
+          </a:fillRef>
+          <a:effectRef idx="2">
+            <a:schemeClr val="accent1"/>
+          </a:effectRef>
+          <a:fontRef idx="minor">
+            <a:schemeClr val="lt1"/>
+          </a:fontRef>
+        </p:style>
+        <p:txBody>
+          <a:bodyPr rtlCol="0" anchor="ctr"/>
+          <a:lstStyle/>
+          <a:p>
+            <a:pPr algn="ctr"/>
+            <a:endParaRPr dirty="0"/>
+          </a:p>
+        </p:txBody>
+      </p:sp>
+      <p:sp>
+        <p:nvSpPr>
+          <p:cNvPr id="7" name="Rounded Rectangle 6"/>
+          <p:cNvSpPr/>
+          <p:nvPr/>
+        </p:nvSpPr>
+        <p:spPr>
+          <a:xfrm>
+            <a:off x="7178040" y="1554480"/>
+            <a:ext cx="4434840" cy="1371600"/>
+          </a:xfrm>
+          <a:prstGeom prst="roundRect">
+            <a:avLst>
+              <a:gd name="adj" fmla="val 10000"/>
+            </a:avLst>
+          </a:prstGeom>
           <a:solidFill>
-            <a:srgbClr val="E6EAF0"/>
+            <a:schemeClr val="bg1"/>
           </a:solidFill>
           <a:ln>
             <a:noFill/>
@@ -8315,14 +8514,60 @@
       </p:sp>
       <p:sp>
         <p:nvSpPr>
-          <p:cNvPr id="5" name="TextBox 4"/>
+          <p:cNvPr id="8" name="Rounded Rectangle 7"/>
+          <p:cNvSpPr/>
+          <p:nvPr/>
+        </p:nvSpPr>
+        <p:spPr>
+          <a:xfrm>
+            <a:off x="7178040" y="1554480"/>
+            <a:ext cx="164592" cy="1371600"/>
+          </a:xfrm>
+          <a:prstGeom prst="roundRect">
+            <a:avLst>
+              <a:gd name="adj" fmla="val 50000"/>
+            </a:avLst>
+          </a:prstGeom>
+          <a:solidFill>
+            <a:srgbClr val="34A853"/>
+          </a:solidFill>
+          <a:ln>
+            <a:noFill/>
+          </a:ln>
+        </p:spPr>
+        <p:style>
+          <a:lnRef idx="1">
+            <a:schemeClr val="accent1"/>
+          </a:lnRef>
+          <a:fillRef idx="3">
+            <a:schemeClr val="accent1"/>
+          </a:fillRef>
+          <a:effectRef idx="2">
+            <a:schemeClr val="accent1"/>
+          </a:effectRef>
+          <a:fontRef idx="minor">
+            <a:schemeClr val="lt1"/>
+          </a:fontRef>
+        </p:style>
+        <p:txBody>
+          <a:bodyPr rtlCol="0" anchor="ctr"/>
+          <a:lstStyle/>
+          <a:p>
+            <a:pPr algn="ctr"/>
+            <a:endParaRPr/>
+          </a:p>
+        </p:txBody>
+      </p:sp>
+      <p:sp>
+        <p:nvSpPr>
+          <p:cNvPr id="9" name="TextBox 8"/>
           <p:cNvSpPr txBox="1"/>
           <p:nvPr/>
         </p:nvSpPr>
         <p:spPr>
           <a:xfrm>
-            <a:off x="822960" y="3474720"/>
-            <a:ext cx="5852160" cy="914400"/>
+            <a:off x="7498079" y="1901952"/>
+            <a:ext cx="4114800" cy="777240"/>
           </a:xfrm>
           <a:prstGeom prst="rect">
             <a:avLst/>
@@ -8335,34 +8580,33 @@
           </a:bodyPr>
           <a:lstStyle/>
           <a:p>
-            <a:pPr algn="ctr">
+            <a:pPr algn="l">
               <a:spcAft>
                 <a:spcPts val="200"/>
               </a:spcAft>
             </a:pPr>
             <a:r>
-              <a:rPr sz="1100" b="0" i="1">
-                <a:solidFill>
-                  <a:srgbClr val="8C96A8"/>
-                </a:solidFill>
-                <a:latin typeface="Roboto"/>
-              </a:rPr>
-              <a:t>[ Figure — Rate–Distortion (ODG) ]
-drop ./report/figures/rd_curve_odg.png</a:t>
-            </a:r>
-          </a:p>
-        </p:txBody>
-      </p:sp>
-      <p:sp>
-        <p:nvSpPr>
-          <p:cNvPr id="6" name="TextBox 5"/>
+              <a:rPr sz="3200" b="1" i="0" dirty="0">
+                <a:solidFill>
+                  <a:srgbClr val="1F2433"/>
+                </a:solidFill>
+                <a:latin typeface="Google Sans"/>
+              </a:rPr>
+              <a:t>48 kbps</a:t>
+            </a:r>
+          </a:p>
+        </p:txBody>
+      </p:sp>
+      <p:sp>
+        <p:nvSpPr>
+          <p:cNvPr id="10" name="TextBox 9"/>
           <p:cNvSpPr txBox="1"/>
           <p:nvPr/>
         </p:nvSpPr>
         <p:spPr>
           <a:xfrm>
-            <a:off x="822960" y="5532120"/>
-            <a:ext cx="5852160" cy="365760"/>
+            <a:off x="7498079" y="2395728"/>
+            <a:ext cx="4114800" cy="411480"/>
           </a:xfrm>
           <a:prstGeom prst="rect">
             <a:avLst/>
@@ -8375,32 +8619,32 @@
           </a:bodyPr>
           <a:lstStyle/>
           <a:p>
-            <a:pPr algn="ctr">
+            <a:pPr algn="l">
               <a:spcAft>
                 <a:spcPts val="200"/>
               </a:spcAft>
             </a:pPr>
             <a:r>
-              <a:rPr sz="1100" b="0" i="1">
-                <a:solidFill>
-                  <a:srgbClr val="8C96A8"/>
+              <a:rPr sz="1200" b="0" i="0" dirty="0">
+                <a:solidFill>
+                  <a:srgbClr val="525B6E"/>
                 </a:solidFill>
                 <a:latin typeface="Roboto"/>
               </a:rPr>
-              <a:t>Figure 5 — ODG vs. bitrate (PESQ-derived)</a:t>
-            </a:r>
-          </a:p>
-        </p:txBody>
-      </p:sp>
-      <p:sp>
-        <p:nvSpPr>
-          <p:cNvPr id="7" name="Rounded Rectangle 6"/>
+              <a:t>Opus transparency (pilot)</a:t>
+            </a:r>
+          </a:p>
+        </p:txBody>
+      </p:sp>
+      <p:sp>
+        <p:nvSpPr>
+          <p:cNvPr id="11" name="Rounded Rectangle 10"/>
           <p:cNvSpPr/>
           <p:nvPr/>
         </p:nvSpPr>
         <p:spPr>
           <a:xfrm>
-            <a:off x="7178040" y="1554480"/>
+            <a:off x="7178040" y="3017520"/>
             <a:ext cx="4434840" cy="1371600"/>
           </a:xfrm>
           <a:prstGeom prst="roundRect">
@@ -8409,7 +8653,7 @@
             </a:avLst>
           </a:prstGeom>
           <a:solidFill>
-            <a:srgbClr val="E6EAF0"/>
+            <a:schemeClr val="bg1"/>
           </a:solidFill>
           <a:ln>
             <a:noFill/>
@@ -8447,13 +8691,13 @@
       </p:sp>
       <p:sp>
         <p:nvSpPr>
-          <p:cNvPr id="8" name="Rounded Rectangle 7"/>
+          <p:cNvPr id="12" name="Rounded Rectangle 11"/>
           <p:cNvSpPr/>
           <p:nvPr/>
         </p:nvSpPr>
         <p:spPr>
           <a:xfrm>
-            <a:off x="7178040" y="1554480"/>
+            <a:off x="7178040" y="3017520"/>
             <a:ext cx="164592" cy="1371600"/>
           </a:xfrm>
           <a:prstGeom prst="roundRect">
@@ -8462,7 +8706,7 @@
             </a:avLst>
           </a:prstGeom>
           <a:solidFill>
-            <a:srgbClr val="34A853"/>
+            <a:srgbClr val="4285F4"/>
           </a:solidFill>
           <a:ln>
             <a:noFill/>
@@ -8493,13 +8737,13 @@
       </p:sp>
       <p:sp>
         <p:nvSpPr>
-          <p:cNvPr id="9" name="TextBox 8"/>
+          <p:cNvPr id="13" name="TextBox 12"/>
           <p:cNvSpPr txBox="1"/>
           <p:nvPr/>
         </p:nvSpPr>
         <p:spPr>
           <a:xfrm>
-            <a:off x="7498079" y="1737360"/>
+            <a:off x="7498079" y="3364992"/>
             <a:ext cx="4114800" cy="777240"/>
           </a:xfrm>
           <a:prstGeom prst="rect">
@@ -8519,26 +8763,26 @@
               </a:spcAft>
             </a:pPr>
             <a:r>
-              <a:rPr sz="3200" b="1" i="0">
+              <a:rPr sz="3200" b="1" i="0" dirty="0">
                 <a:solidFill>
                   <a:srgbClr val="1F2433"/>
                 </a:solidFill>
                 <a:latin typeface="Google Sans"/>
               </a:rPr>
-              <a:t>48 kbps</a:t>
-            </a:r>
-          </a:p>
-        </p:txBody>
-      </p:sp>
-      <p:sp>
-        <p:nvSpPr>
-          <p:cNvPr id="10" name="TextBox 9"/>
+              <a:t>64 kbps</a:t>
+            </a:r>
+          </a:p>
+        </p:txBody>
+      </p:sp>
+      <p:sp>
+        <p:nvSpPr>
+          <p:cNvPr id="14" name="TextBox 13"/>
           <p:cNvSpPr txBox="1"/>
           <p:nvPr/>
         </p:nvSpPr>
         <p:spPr>
           <a:xfrm>
-            <a:off x="7498079" y="2423160"/>
+            <a:off x="7498079" y="3858768"/>
             <a:ext cx="4114800" cy="411480"/>
           </a:xfrm>
           <a:prstGeom prst="rect">
@@ -8564,20 +8808,20 @@
                 </a:solidFill>
                 <a:latin typeface="Roboto"/>
               </a:rPr>
-              <a:t>Opus transparency (pilot)</a:t>
-            </a:r>
-          </a:p>
-        </p:txBody>
-      </p:sp>
-      <p:sp>
-        <p:nvSpPr>
-          <p:cNvPr id="11" name="Rounded Rectangle 10"/>
+              <a:t>MP3 / AAC transparency</a:t>
+            </a:r>
+          </a:p>
+        </p:txBody>
+      </p:sp>
+      <p:sp>
+        <p:nvSpPr>
+          <p:cNvPr id="15" name="Rounded Rectangle 14"/>
           <p:cNvSpPr/>
           <p:nvPr/>
         </p:nvSpPr>
         <p:spPr>
           <a:xfrm>
-            <a:off x="7178040" y="3017520"/>
+            <a:off x="7178040" y="4480560"/>
             <a:ext cx="4434840" cy="1371600"/>
           </a:xfrm>
           <a:prstGeom prst="roundRect">
@@ -8586,7 +8830,7 @@
             </a:avLst>
           </a:prstGeom>
           <a:solidFill>
-            <a:srgbClr val="E6EAF0"/>
+            <a:schemeClr val="bg1"/>
           </a:solidFill>
           <a:ln>
             <a:noFill/>
@@ -8624,183 +8868,6 @@
       </p:sp>
       <p:sp>
         <p:nvSpPr>
-          <p:cNvPr id="12" name="Rounded Rectangle 11"/>
-          <p:cNvSpPr/>
-          <p:nvPr/>
-        </p:nvSpPr>
-        <p:spPr>
-          <a:xfrm>
-            <a:off x="7178040" y="3017520"/>
-            <a:ext cx="164592" cy="1371600"/>
-          </a:xfrm>
-          <a:prstGeom prst="roundRect">
-            <a:avLst>
-              <a:gd name="adj" fmla="val 50000"/>
-            </a:avLst>
-          </a:prstGeom>
-          <a:solidFill>
-            <a:srgbClr val="4285F4"/>
-          </a:solidFill>
-          <a:ln>
-            <a:noFill/>
-          </a:ln>
-        </p:spPr>
-        <p:style>
-          <a:lnRef idx="1">
-            <a:schemeClr val="accent1"/>
-          </a:lnRef>
-          <a:fillRef idx="3">
-            <a:schemeClr val="accent1"/>
-          </a:fillRef>
-          <a:effectRef idx="2">
-            <a:schemeClr val="accent1"/>
-          </a:effectRef>
-          <a:fontRef idx="minor">
-            <a:schemeClr val="lt1"/>
-          </a:fontRef>
-        </p:style>
-        <p:txBody>
-          <a:bodyPr rtlCol="0" anchor="ctr"/>
-          <a:lstStyle/>
-          <a:p>
-            <a:pPr algn="ctr"/>
-            <a:endParaRPr/>
-          </a:p>
-        </p:txBody>
-      </p:sp>
-      <p:sp>
-        <p:nvSpPr>
-          <p:cNvPr id="13" name="TextBox 12"/>
-          <p:cNvSpPr txBox="1"/>
-          <p:nvPr/>
-        </p:nvSpPr>
-        <p:spPr>
-          <a:xfrm>
-            <a:off x="7498079" y="3200400"/>
-            <a:ext cx="4114800" cy="777240"/>
-          </a:xfrm>
-          <a:prstGeom prst="rect">
-            <a:avLst/>
-          </a:prstGeom>
-          <a:noFill/>
-        </p:spPr>
-        <p:txBody>
-          <a:bodyPr wrap="square" lIns="0" tIns="0" rIns="0" bIns="0" anchor="t">
-            <a:spAutoFit/>
-          </a:bodyPr>
-          <a:lstStyle/>
-          <a:p>
-            <a:pPr algn="l">
-              <a:spcAft>
-                <a:spcPts val="200"/>
-              </a:spcAft>
-            </a:pPr>
-            <a:r>
-              <a:rPr sz="3200" b="1" i="0">
-                <a:solidFill>
-                  <a:srgbClr val="1F2433"/>
-                </a:solidFill>
-                <a:latin typeface="Google Sans"/>
-              </a:rPr>
-              <a:t>64 kbps</a:t>
-            </a:r>
-          </a:p>
-        </p:txBody>
-      </p:sp>
-      <p:sp>
-        <p:nvSpPr>
-          <p:cNvPr id="14" name="TextBox 13"/>
-          <p:cNvSpPr txBox="1"/>
-          <p:nvPr/>
-        </p:nvSpPr>
-        <p:spPr>
-          <a:xfrm>
-            <a:off x="7498079" y="3886200"/>
-            <a:ext cx="4114800" cy="411480"/>
-          </a:xfrm>
-          <a:prstGeom prst="rect">
-            <a:avLst/>
-          </a:prstGeom>
-          <a:noFill/>
-        </p:spPr>
-        <p:txBody>
-          <a:bodyPr wrap="square" lIns="0" tIns="0" rIns="0" bIns="0" anchor="t">
-            <a:spAutoFit/>
-          </a:bodyPr>
-          <a:lstStyle/>
-          <a:p>
-            <a:pPr algn="l">
-              <a:spcAft>
-                <a:spcPts val="200"/>
-              </a:spcAft>
-            </a:pPr>
-            <a:r>
-              <a:rPr sz="1200" b="0" i="0">
-                <a:solidFill>
-                  <a:srgbClr val="525B6E"/>
-                </a:solidFill>
-                <a:latin typeface="Roboto"/>
-              </a:rPr>
-              <a:t>MP3 / AAC transparency</a:t>
-            </a:r>
-          </a:p>
-        </p:txBody>
-      </p:sp>
-      <p:sp>
-        <p:nvSpPr>
-          <p:cNvPr id="15" name="Rounded Rectangle 14"/>
-          <p:cNvSpPr/>
-          <p:nvPr/>
-        </p:nvSpPr>
-        <p:spPr>
-          <a:xfrm>
-            <a:off x="7178040" y="4480560"/>
-            <a:ext cx="4434840" cy="1371600"/>
-          </a:xfrm>
-          <a:prstGeom prst="roundRect">
-            <a:avLst>
-              <a:gd name="adj" fmla="val 10000"/>
-            </a:avLst>
-          </a:prstGeom>
-          <a:solidFill>
-            <a:srgbClr val="E6EAF0"/>
-          </a:solidFill>
-          <a:ln>
-            <a:noFill/>
-          </a:ln>
-          <a:effectLst>
-            <a:outerShdw blurRad="80000" dist="18000" dir="2700000" rotWithShape="0">
-              <a:srgbClr val="BCC4D0">
-                <a:alpha val="42000"/>
-              </a:srgbClr>
-            </a:outerShdw>
-          </a:effectLst>
-        </p:spPr>
-        <p:style>
-          <a:lnRef idx="1">
-            <a:schemeClr val="accent1"/>
-          </a:lnRef>
-          <a:fillRef idx="3">
-            <a:schemeClr val="accent1"/>
-          </a:fillRef>
-          <a:effectRef idx="2">
-            <a:schemeClr val="accent1"/>
-          </a:effectRef>
-          <a:fontRef idx="minor">
-            <a:schemeClr val="lt1"/>
-          </a:fontRef>
-        </p:style>
-        <p:txBody>
-          <a:bodyPr rtlCol="0" anchor="ctr"/>
-          <a:lstStyle/>
-          <a:p>
-            <a:pPr algn="ctr"/>
-            <a:endParaRPr/>
-          </a:p>
-        </p:txBody>
-      </p:sp>
-      <p:sp>
-        <p:nvSpPr>
           <p:cNvPr id="16" name="Rounded Rectangle 15"/>
           <p:cNvSpPr/>
           <p:nvPr/>
@@ -8853,7 +8920,7 @@
         </p:nvSpPr>
         <p:spPr>
           <a:xfrm>
-            <a:off x="7498079" y="4663440"/>
+            <a:off x="7498079" y="4828032"/>
             <a:ext cx="4114800" cy="777240"/>
           </a:xfrm>
           <a:prstGeom prst="rect">
@@ -8873,14 +8940,29 @@
               </a:spcAft>
             </a:pPr>
             <a:r>
-              <a:rPr sz="3200" b="1" i="0">
+              <a:rPr sz="3200" b="1" i="0" dirty="0">
                 <a:solidFill>
                   <a:srgbClr val="1F2433"/>
                 </a:solidFill>
                 <a:latin typeface="Google Sans"/>
               </a:rPr>
-              <a:t>≈ 20 ms</a:t>
-            </a:r>
+              <a:t>≈ 20 </a:t>
+            </a:r>
+            <a:r>
+              <a:rPr sz="3200" b="1" i="0" dirty="0" err="1">
+                <a:solidFill>
+                  <a:srgbClr val="1F2433"/>
+                </a:solidFill>
+                <a:latin typeface="Google Sans"/>
+              </a:rPr>
+              <a:t>ms</a:t>
+            </a:r>
+            <a:endParaRPr sz="3200" b="1" i="0" dirty="0">
+              <a:solidFill>
+                <a:srgbClr val="1F2433"/>
+              </a:solidFill>
+              <a:latin typeface="Google Sans"/>
+            </a:endParaRPr>
           </a:p>
         </p:txBody>
       </p:sp>
@@ -8892,7 +8974,7 @@
         </p:nvSpPr>
         <p:spPr>
           <a:xfrm>
-            <a:off x="7498079" y="5349240"/>
+            <a:off x="7498079" y="5321808"/>
             <a:ext cx="4114800" cy="411480"/>
           </a:xfrm>
           <a:prstGeom prst="rect">
@@ -8964,14 +9046,20 @@
       </p:sp>
       <p:sp>
         <p:nvSpPr>
-          <p:cNvPr id="20" name="TextBox 19"/>
+          <p:cNvPr id="21" name="TextBox 20">
+            <a:extLst>
+              <a:ext uri="{FF2B5EF4-FFF2-40B4-BE49-F238E27FC236}">
+                <a16:creationId xmlns:a16="http://schemas.microsoft.com/office/drawing/2014/main" id="{6664F3E8-DB60-1D53-4603-CCDB50C9A2AC}"/>
+              </a:ext>
+            </a:extLst>
+          </p:cNvPr>
           <p:cNvSpPr txBox="1"/>
           <p:nvPr/>
         </p:nvSpPr>
         <p:spPr>
           <a:xfrm>
-            <a:off x="10698480" y="6446520"/>
-            <a:ext cx="1554480" cy="274320"/>
+            <a:off x="10561320" y="6620256"/>
+            <a:ext cx="1554480" cy="153888"/>
           </a:xfrm>
           <a:prstGeom prst="rect">
             <a:avLst/>
@@ -8990,13 +9078,22 @@
               </a:spcAft>
             </a:pPr>
             <a:r>
-              <a:rPr sz="1000" b="0" i="0">
+              <a:rPr lang="en-US" sz="1000" b="0" i="0" dirty="0">
                 <a:solidFill>
                   <a:srgbClr val="8C96A8"/>
                 </a:solidFill>
                 <a:latin typeface="Roboto"/>
               </a:rPr>
-              <a:t>5 / 10</a:t>
+              <a:t>5</a:t>
+            </a:r>
+            <a:r>
+              <a:rPr sz="1000" b="0" i="0" dirty="0">
+                <a:solidFill>
+                  <a:srgbClr val="8C96A8"/>
+                </a:solidFill>
+                <a:latin typeface="Roboto"/>
+              </a:rPr>
+              <a:t> / 10</a:t>
             </a:r>
           </a:p>
         </p:txBody>
@@ -9120,7 +9217,7 @@
         </p:nvSpPr>
         <p:spPr>
           <a:xfrm>
-            <a:off x="548640" y="1554480"/>
+            <a:off x="548640" y="2331720"/>
             <a:ext cx="11064240" cy="2194560"/>
           </a:xfrm>
           <a:prstGeom prst="roundRect">
@@ -9129,7 +9226,7 @@
             </a:avLst>
           </a:prstGeom>
           <a:solidFill>
-            <a:srgbClr val="EEF1F6"/>
+            <a:schemeClr val="bg1"/>
           </a:solidFill>
           <a:ln>
             <a:noFill/>
@@ -9173,7 +9270,7 @@
         </p:nvSpPr>
         <p:spPr>
           <a:xfrm>
-            <a:off x="914400" y="1691640"/>
+            <a:off x="1152144" y="2468880"/>
             <a:ext cx="2743200" cy="365760"/>
           </a:xfrm>
           <a:prstGeom prst="rect">
@@ -9193,7 +9290,7 @@
               </a:spcAft>
             </a:pPr>
             <a:r>
-              <a:rPr sz="1200" b="1" i="0">
+              <a:rPr sz="1200" b="1" i="0" dirty="0">
                 <a:solidFill>
                   <a:srgbClr val="8C96A8"/>
                 </a:solidFill>
@@ -9212,7 +9309,7 @@
         </p:nvSpPr>
         <p:spPr>
           <a:xfrm>
-            <a:off x="3291840" y="1691640"/>
+            <a:off x="3291840" y="2468880"/>
             <a:ext cx="2743200" cy="365760"/>
           </a:xfrm>
           <a:prstGeom prst="rect">
@@ -9251,7 +9348,7 @@
         </p:nvSpPr>
         <p:spPr>
           <a:xfrm>
-            <a:off x="5852160" y="1691640"/>
+            <a:off x="5852160" y="2468880"/>
             <a:ext cx="2743200" cy="365760"/>
           </a:xfrm>
           <a:prstGeom prst="rect">
@@ -9290,7 +9387,7 @@
         </p:nvSpPr>
         <p:spPr>
           <a:xfrm>
-            <a:off x="8595360" y="1691640"/>
+            <a:off x="8595360" y="2468880"/>
             <a:ext cx="2743200" cy="365760"/>
           </a:xfrm>
           <a:prstGeom prst="rect">
@@ -9329,7 +9426,7 @@
         </p:nvSpPr>
         <p:spPr>
           <a:xfrm>
-            <a:off x="914400" y="2103120"/>
+            <a:off x="914400" y="2880360"/>
             <a:ext cx="914400" cy="457200"/>
           </a:xfrm>
           <a:prstGeom prst="roundRect">
@@ -9383,7 +9480,7 @@
         </p:nvSpPr>
         <p:spPr>
           <a:xfrm>
-            <a:off x="3291840" y="2148840"/>
+            <a:off x="3291840" y="2926080"/>
             <a:ext cx="2743200" cy="457200"/>
           </a:xfrm>
           <a:prstGeom prst="rect">
@@ -9422,7 +9519,7 @@
         </p:nvSpPr>
         <p:spPr>
           <a:xfrm>
-            <a:off x="5852160" y="2148840"/>
+            <a:off x="5852160" y="2926080"/>
             <a:ext cx="2743200" cy="457200"/>
           </a:xfrm>
           <a:prstGeom prst="rect">
@@ -9461,7 +9558,7 @@
         </p:nvSpPr>
         <p:spPr>
           <a:xfrm>
-            <a:off x="8595360" y="2148840"/>
+            <a:off x="8595360" y="2926080"/>
             <a:ext cx="2743200" cy="457200"/>
           </a:xfrm>
           <a:prstGeom prst="rect">
@@ -9500,7 +9597,7 @@
         </p:nvSpPr>
         <p:spPr>
           <a:xfrm>
-            <a:off x="914400" y="2606040"/>
+            <a:off x="914400" y="3383280"/>
             <a:ext cx="914400" cy="457200"/>
           </a:xfrm>
           <a:prstGeom prst="roundRect">
@@ -9554,7 +9651,7 @@
         </p:nvSpPr>
         <p:spPr>
           <a:xfrm>
-            <a:off x="3291840" y="2651760"/>
+            <a:off x="3291840" y="3429000"/>
             <a:ext cx="2743200" cy="457200"/>
           </a:xfrm>
           <a:prstGeom prst="rect">
@@ -9593,7 +9690,7 @@
         </p:nvSpPr>
         <p:spPr>
           <a:xfrm>
-            <a:off x="5852160" y="2651760"/>
+            <a:off x="5852160" y="3429000"/>
             <a:ext cx="2743200" cy="457200"/>
           </a:xfrm>
           <a:prstGeom prst="rect">
@@ -9632,7 +9729,7 @@
         </p:nvSpPr>
         <p:spPr>
           <a:xfrm>
-            <a:off x="8595360" y="2651760"/>
+            <a:off x="8595360" y="3429000"/>
             <a:ext cx="2743200" cy="457200"/>
           </a:xfrm>
           <a:prstGeom prst="rect">
@@ -9671,7 +9768,7 @@
         </p:nvSpPr>
         <p:spPr>
           <a:xfrm>
-            <a:off x="914400" y="3108960"/>
+            <a:off x="914400" y="3886200"/>
             <a:ext cx="914400" cy="457200"/>
           </a:xfrm>
           <a:prstGeom prst="roundRect">
@@ -9725,7 +9822,7 @@
         </p:nvSpPr>
         <p:spPr>
           <a:xfrm>
-            <a:off x="3291840" y="3154680"/>
+            <a:off x="3291840" y="3931920"/>
             <a:ext cx="2743200" cy="457200"/>
           </a:xfrm>
           <a:prstGeom prst="rect">
@@ -9764,7 +9861,7 @@
         </p:nvSpPr>
         <p:spPr>
           <a:xfrm>
-            <a:off x="5852160" y="3154680"/>
+            <a:off x="5852160" y="3931920"/>
             <a:ext cx="2743200" cy="457200"/>
           </a:xfrm>
           <a:prstGeom prst="rect">
@@ -9803,7 +9900,7 @@
         </p:nvSpPr>
         <p:spPr>
           <a:xfrm>
-            <a:off x="8595360" y="3154680"/>
+            <a:off x="8595360" y="3931920"/>
             <a:ext cx="2743200" cy="457200"/>
           </a:xfrm>
           <a:prstGeom prst="rect">
@@ -9842,8 +9939,8 @@
         </p:nvSpPr>
         <p:spPr>
           <a:xfrm>
-            <a:off x="548640" y="4023360"/>
-            <a:ext cx="11064240" cy="2103120"/>
+            <a:off x="548640" y="4696896"/>
+            <a:ext cx="11064240" cy="1429583"/>
           </a:xfrm>
           <a:prstGeom prst="roundRect">
             <a:avLst>
@@ -9895,8 +9992,8 @@
         </p:nvSpPr>
         <p:spPr>
           <a:xfrm>
-            <a:off x="548640" y="4023360"/>
-            <a:ext cx="70000" cy="2103120"/>
+            <a:off x="548640" y="4696896"/>
+            <a:ext cx="70000" cy="1429583"/>
           </a:xfrm>
           <a:prstGeom prst="roundRect">
             <a:avLst>
@@ -9948,8 +10045,8 @@
         </p:nvSpPr>
         <p:spPr>
           <a:xfrm>
-            <a:off x="914400" y="4160520"/>
-            <a:ext cx="10058400" cy="457200"/>
+            <a:off x="914400" y="4995743"/>
+            <a:ext cx="10058400" cy="307777"/>
           </a:xfrm>
           <a:prstGeom prst="rect">
             <a:avLst/>
@@ -9968,7 +10065,7 @@
               </a:spcAft>
             </a:pPr>
             <a:r>
-              <a:rPr sz="1200" b="1" i="0">
+              <a:rPr sz="2000" b="1" i="0" dirty="0">
                 <a:solidFill>
                   <a:srgbClr val="4285F4"/>
                 </a:solidFill>
@@ -9987,7 +10084,7 @@
         </p:nvSpPr>
         <p:spPr>
           <a:xfrm>
-            <a:off x="914400" y="4572000"/>
+            <a:off x="914400" y="5361503"/>
             <a:ext cx="10515600" cy="1554480"/>
           </a:xfrm>
           <a:prstGeom prst="rect">
@@ -10007,7 +10104,7 @@
               </a:spcAft>
             </a:pPr>
             <a:r>
-              <a:rPr sz="1800" b="0" i="0">
+              <a:rPr sz="1800" b="0" i="0" dirty="0">
                 <a:solidFill>
                   <a:srgbClr val="1F2433"/>
                 </a:solidFill>
@@ -10060,14 +10157,20 @@
       </p:sp>
       <p:sp>
         <p:nvSpPr>
-          <p:cNvPr id="26" name="TextBox 25"/>
+          <p:cNvPr id="27" name="TextBox 26">
+            <a:extLst>
+              <a:ext uri="{FF2B5EF4-FFF2-40B4-BE49-F238E27FC236}">
+                <a16:creationId xmlns:a16="http://schemas.microsoft.com/office/drawing/2014/main" id="{C834F7FE-DEFE-E939-8736-718D53C84AA6}"/>
+              </a:ext>
+            </a:extLst>
+          </p:cNvPr>
           <p:cNvSpPr txBox="1"/>
           <p:nvPr/>
         </p:nvSpPr>
         <p:spPr>
           <a:xfrm>
-            <a:off x="10698480" y="6446520"/>
-            <a:ext cx="1554480" cy="274320"/>
+            <a:off x="10561320" y="6620256"/>
+            <a:ext cx="1554480" cy="153888"/>
           </a:xfrm>
           <a:prstGeom prst="rect">
             <a:avLst/>
@@ -10086,17 +10189,80 @@
               </a:spcAft>
             </a:pPr>
             <a:r>
-              <a:rPr sz="1000" b="0" i="0">
+              <a:rPr lang="en-US" sz="1000" dirty="0">
                 <a:solidFill>
                   <a:srgbClr val="8C96A8"/>
                 </a:solidFill>
                 <a:latin typeface="Roboto"/>
               </a:rPr>
-              <a:t>6 / 10</a:t>
-            </a:r>
-          </a:p>
-        </p:txBody>
-      </p:sp>
+              <a:t>6</a:t>
+            </a:r>
+            <a:r>
+              <a:rPr sz="1000" b="0" i="0" dirty="0">
+                <a:solidFill>
+                  <a:srgbClr val="8C96A8"/>
+                </a:solidFill>
+                <a:latin typeface="Roboto"/>
+              </a:rPr>
+              <a:t> / 10</a:t>
+            </a:r>
+          </a:p>
+        </p:txBody>
+      </p:sp>
+      <p:pic>
+        <p:nvPicPr>
+          <p:cNvPr id="28" name="Picture 27">
+            <a:extLst>
+              <a:ext uri="{FF2B5EF4-FFF2-40B4-BE49-F238E27FC236}">
+                <a16:creationId xmlns:a16="http://schemas.microsoft.com/office/drawing/2014/main" id="{53D797C9-18D1-CDAA-20D6-0F88E30E2759}"/>
+              </a:ext>
+            </a:extLst>
+          </p:cNvPr>
+          <p:cNvPicPr>
+            <a:picLocks noChangeAspect="1"/>
+          </p:cNvPicPr>
+          <p:nvPr/>
+        </p:nvPicPr>
+        <p:blipFill>
+          <a:blip r:embed="rId3"/>
+          <a:stretch>
+            <a:fillRect/>
+          </a:stretch>
+        </p:blipFill>
+        <p:spPr>
+          <a:xfrm>
+            <a:off x="5852160" y="298230"/>
+            <a:ext cx="5760720" cy="1862874"/>
+          </a:xfrm>
+          <a:prstGeom prst="roundRect">
+            <a:avLst>
+              <a:gd name="adj" fmla="val 16667"/>
+            </a:avLst>
+          </a:prstGeom>
+          <a:ln>
+            <a:noFill/>
+          </a:ln>
+          <a:effectLst>
+            <a:outerShdw blurRad="76200" dist="38100" dir="7800000" algn="tl" rotWithShape="0">
+              <a:srgbClr val="000000">
+                <a:alpha val="40000"/>
+              </a:srgbClr>
+            </a:outerShdw>
+          </a:effectLst>
+          <a:scene3d>
+            <a:camera prst="orthographicFront"/>
+            <a:lightRig rig="contrasting" dir="t">
+              <a:rot lat="0" lon="0" rev="4200000"/>
+            </a:lightRig>
+          </a:scene3d>
+          <a:sp3d prstMaterial="plastic">
+            <a:bevelT w="381000" h="114300" prst="relaxedInset"/>
+            <a:contourClr>
+              <a:srgbClr val="969696"/>
+            </a:contourClr>
+          </a:sp3d>
+        </p:spPr>
+      </p:pic>
     </p:spTree>
   </p:cSld>
   <p:clrMapOvr>
@@ -10216,8 +10382,8 @@
         </p:nvSpPr>
         <p:spPr>
           <a:xfrm>
-            <a:off x="548640" y="1600200"/>
-            <a:ext cx="3611880" cy="2194560"/>
+            <a:off x="548640" y="2925563"/>
+            <a:ext cx="3611880" cy="1536192"/>
           </a:xfrm>
           <a:prstGeom prst="roundRect">
             <a:avLst>
@@ -10225,7 +10391,7 @@
             </a:avLst>
           </a:prstGeom>
           <a:solidFill>
-            <a:srgbClr val="E6EAF0"/>
+            <a:schemeClr val="bg1"/>
           </a:solidFill>
           <a:ln>
             <a:noFill/>
@@ -10269,7 +10435,7 @@
         </p:nvSpPr>
         <p:spPr>
           <a:xfrm>
-            <a:off x="548640" y="1600200"/>
+            <a:off x="548640" y="2925563"/>
             <a:ext cx="3611880" cy="164592"/>
           </a:xfrm>
           <a:prstGeom prst="roundRect">
@@ -10315,8 +10481,8 @@
         </p:nvSpPr>
         <p:spPr>
           <a:xfrm>
-            <a:off x="822960" y="1874519"/>
-            <a:ext cx="3291840" cy="1005840"/>
+            <a:off x="699672" y="3327898"/>
+            <a:ext cx="3291840" cy="677108"/>
           </a:xfrm>
           <a:prstGeom prst="rect">
             <a:avLst/>
@@ -10329,13 +10495,13 @@
           </a:bodyPr>
           <a:lstStyle/>
           <a:p>
-            <a:pPr algn="l">
+            <a:pPr algn="ctr">
               <a:spcAft>
                 <a:spcPts val="200"/>
               </a:spcAft>
             </a:pPr>
             <a:r>
-              <a:rPr sz="4400" b="1" i="0">
+              <a:rPr sz="4400" b="1" i="0" dirty="0">
                 <a:solidFill>
                   <a:srgbClr val="1F2433"/>
                 </a:solidFill>
@@ -10354,8 +10520,8 @@
         </p:nvSpPr>
         <p:spPr>
           <a:xfrm>
-            <a:off x="822960" y="2971800"/>
-            <a:ext cx="3291840" cy="640080"/>
+            <a:off x="699672" y="3977123"/>
+            <a:ext cx="3291840" cy="200055"/>
           </a:xfrm>
           <a:prstGeom prst="rect">
             <a:avLst/>
@@ -10368,13 +10534,13 @@
           </a:bodyPr>
           <a:lstStyle/>
           <a:p>
-            <a:pPr algn="l">
+            <a:pPr algn="ctr">
               <a:spcAft>
                 <a:spcPts val="200"/>
               </a:spcAft>
             </a:pPr>
             <a:r>
-              <a:rPr sz="1300" b="0" i="0">
+              <a:rPr sz="1300" b="0" i="0" dirty="0">
                 <a:solidFill>
                   <a:srgbClr val="525B6E"/>
                 </a:solidFill>
@@ -10393,8 +10559,8 @@
         </p:nvSpPr>
         <p:spPr>
           <a:xfrm>
-            <a:off x="4343400" y="1600200"/>
-            <a:ext cx="3611880" cy="2194560"/>
+            <a:off x="4343400" y="2925563"/>
+            <a:ext cx="3611880" cy="1536192"/>
           </a:xfrm>
           <a:prstGeom prst="roundRect">
             <a:avLst>
@@ -10402,7 +10568,7 @@
             </a:avLst>
           </a:prstGeom>
           <a:solidFill>
-            <a:srgbClr val="E6EAF0"/>
+            <a:schemeClr val="bg1"/>
           </a:solidFill>
           <a:ln>
             <a:noFill/>
@@ -10446,7 +10612,7 @@
         </p:nvSpPr>
         <p:spPr>
           <a:xfrm>
-            <a:off x="4343400" y="1600200"/>
+            <a:off x="4343400" y="2925563"/>
             <a:ext cx="3611880" cy="164592"/>
           </a:xfrm>
           <a:prstGeom prst="roundRect">
@@ -10492,8 +10658,8 @@
         </p:nvSpPr>
         <p:spPr>
           <a:xfrm>
-            <a:off x="4617720" y="1874519"/>
-            <a:ext cx="3291840" cy="1005840"/>
+            <a:off x="4494432" y="3327898"/>
+            <a:ext cx="3291840" cy="677108"/>
           </a:xfrm>
           <a:prstGeom prst="rect">
             <a:avLst/>
@@ -10506,7 +10672,7 @@
           </a:bodyPr>
           <a:lstStyle/>
           <a:p>
-            <a:pPr algn="l">
+            <a:pPr algn="ctr">
               <a:spcAft>
                 <a:spcPts val="200"/>
               </a:spcAft>
@@ -10531,8 +10697,8 @@
         </p:nvSpPr>
         <p:spPr>
           <a:xfrm>
-            <a:off x="4617720" y="2971800"/>
-            <a:ext cx="3291840" cy="640080"/>
+            <a:off x="4494432" y="3977123"/>
+            <a:ext cx="3291840" cy="200055"/>
           </a:xfrm>
           <a:prstGeom prst="rect">
             <a:avLst/>
@@ -10545,7 +10711,7 @@
           </a:bodyPr>
           <a:lstStyle/>
           <a:p>
-            <a:pPr algn="l">
+            <a:pPr algn="ctr">
               <a:spcAft>
                 <a:spcPts val="200"/>
               </a:spcAft>
@@ -10570,8 +10736,8 @@
         </p:nvSpPr>
         <p:spPr>
           <a:xfrm>
-            <a:off x="8138160" y="1600200"/>
-            <a:ext cx="3611880" cy="2194560"/>
+            <a:off x="8138160" y="2925563"/>
+            <a:ext cx="3611880" cy="1536192"/>
           </a:xfrm>
           <a:prstGeom prst="roundRect">
             <a:avLst>
@@ -10579,7 +10745,7 @@
             </a:avLst>
           </a:prstGeom>
           <a:solidFill>
-            <a:srgbClr val="E6EAF0"/>
+            <a:schemeClr val="bg1"/>
           </a:solidFill>
           <a:ln>
             <a:noFill/>
@@ -10623,7 +10789,7 @@
         </p:nvSpPr>
         <p:spPr>
           <a:xfrm>
-            <a:off x="8138160" y="1600200"/>
+            <a:off x="8138160" y="2925563"/>
             <a:ext cx="3611880" cy="164592"/>
           </a:xfrm>
           <a:prstGeom prst="roundRect">
@@ -10669,8 +10835,8 @@
         </p:nvSpPr>
         <p:spPr>
           <a:xfrm>
-            <a:off x="8412480" y="1874519"/>
-            <a:ext cx="3291840" cy="1005840"/>
+            <a:off x="8289192" y="3327898"/>
+            <a:ext cx="3291840" cy="677108"/>
           </a:xfrm>
           <a:prstGeom prst="rect">
             <a:avLst/>
@@ -10683,7 +10849,7 @@
           </a:bodyPr>
           <a:lstStyle/>
           <a:p>
-            <a:pPr algn="l">
+            <a:pPr algn="ctr">
               <a:spcAft>
                 <a:spcPts val="200"/>
               </a:spcAft>
@@ -10708,8 +10874,8 @@
         </p:nvSpPr>
         <p:spPr>
           <a:xfrm>
-            <a:off x="8412480" y="2971800"/>
-            <a:ext cx="3291840" cy="640080"/>
+            <a:off x="8289192" y="3977123"/>
+            <a:ext cx="3291840" cy="200055"/>
           </a:xfrm>
           <a:prstGeom prst="rect">
             <a:avLst/>
@@ -10722,7 +10888,7 @@
           </a:bodyPr>
           <a:lstStyle/>
           <a:p>
-            <a:pPr algn="l">
+            <a:pPr algn="ctr">
               <a:spcAft>
                 <a:spcPts val="200"/>
               </a:spcAft>
@@ -10747,8 +10913,8 @@
         </p:nvSpPr>
         <p:spPr>
           <a:xfrm>
-            <a:off x="548640" y="4069080"/>
-            <a:ext cx="11064240" cy="2057400"/>
+            <a:off x="548640" y="4590288"/>
+            <a:ext cx="11064240" cy="1536192"/>
           </a:xfrm>
           <a:prstGeom prst="roundRect">
             <a:avLst>
@@ -10800,8 +10966,8 @@
         </p:nvSpPr>
         <p:spPr>
           <a:xfrm>
-            <a:off x="548640" y="4069080"/>
-            <a:ext cx="70000" cy="2057400"/>
+            <a:off x="548640" y="4590288"/>
+            <a:ext cx="70000" cy="1536192"/>
           </a:xfrm>
           <a:prstGeom prst="roundRect">
             <a:avLst>
@@ -10853,8 +11019,8 @@
         </p:nvSpPr>
         <p:spPr>
           <a:xfrm>
-            <a:off x="914400" y="4206240"/>
-            <a:ext cx="10058400" cy="457200"/>
+            <a:off x="914400" y="4916661"/>
+            <a:ext cx="10058400" cy="307777"/>
           </a:xfrm>
           <a:prstGeom prst="rect">
             <a:avLst/>
@@ -10873,7 +11039,7 @@
               </a:spcAft>
             </a:pPr>
             <a:r>
-              <a:rPr sz="1200" b="1" i="0">
+              <a:rPr sz="2000" b="1" i="0" dirty="0">
                 <a:solidFill>
                   <a:srgbClr val="EA4335"/>
                 </a:solidFill>
@@ -10892,7 +11058,7 @@
         </p:nvSpPr>
         <p:spPr>
           <a:xfrm>
-            <a:off x="914400" y="4617720"/>
+            <a:off x="914400" y="5300709"/>
             <a:ext cx="10515600" cy="1554480"/>
           </a:xfrm>
           <a:prstGeom prst="rect">
@@ -10912,7 +11078,7 @@
               </a:spcAft>
             </a:pPr>
             <a:r>
-              <a:rPr sz="1700" b="0" i="0">
+              <a:rPr sz="1700" b="0" i="0" dirty="0">
                 <a:solidFill>
                   <a:srgbClr val="1F2433"/>
                 </a:solidFill>
@@ -10965,14 +11131,20 @@
       </p:sp>
       <p:sp>
         <p:nvSpPr>
-          <p:cNvPr id="21" name="TextBox 20"/>
+          <p:cNvPr id="22" name="TextBox 21">
+            <a:extLst>
+              <a:ext uri="{FF2B5EF4-FFF2-40B4-BE49-F238E27FC236}">
+                <a16:creationId xmlns:a16="http://schemas.microsoft.com/office/drawing/2014/main" id="{DB82A4FF-5EE8-0696-89DA-82CD48119E74}"/>
+              </a:ext>
+            </a:extLst>
+          </p:cNvPr>
           <p:cNvSpPr txBox="1"/>
           <p:nvPr/>
         </p:nvSpPr>
         <p:spPr>
           <a:xfrm>
-            <a:off x="10698480" y="6446520"/>
-            <a:ext cx="1554480" cy="274320"/>
+            <a:off x="10561320" y="6620256"/>
+            <a:ext cx="1554480" cy="153888"/>
           </a:xfrm>
           <a:prstGeom prst="rect">
             <a:avLst/>
@@ -10991,17 +11163,80 @@
               </a:spcAft>
             </a:pPr>
             <a:r>
-              <a:rPr sz="1000" b="0" i="0">
+              <a:rPr lang="en-US" sz="1000" dirty="0">
                 <a:solidFill>
                   <a:srgbClr val="8C96A8"/>
                 </a:solidFill>
                 <a:latin typeface="Roboto"/>
               </a:rPr>
-              <a:t>7 / 10</a:t>
-            </a:r>
-          </a:p>
-        </p:txBody>
-      </p:sp>
+              <a:t>7</a:t>
+            </a:r>
+            <a:r>
+              <a:rPr sz="1000" b="0" i="0" dirty="0">
+                <a:solidFill>
+                  <a:srgbClr val="8C96A8"/>
+                </a:solidFill>
+                <a:latin typeface="Roboto"/>
+              </a:rPr>
+              <a:t> / 10</a:t>
+            </a:r>
+          </a:p>
+        </p:txBody>
+      </p:sp>
+      <p:pic>
+        <p:nvPicPr>
+          <p:cNvPr id="23" name="Picture 22">
+            <a:extLst>
+              <a:ext uri="{FF2B5EF4-FFF2-40B4-BE49-F238E27FC236}">
+                <a16:creationId xmlns:a16="http://schemas.microsoft.com/office/drawing/2014/main" id="{00A3BBD0-B143-6E46-F328-1EC7846C733F}"/>
+              </a:ext>
+            </a:extLst>
+          </p:cNvPr>
+          <p:cNvPicPr>
+            <a:picLocks noChangeAspect="1"/>
+          </p:cNvPicPr>
+          <p:nvPr/>
+        </p:nvPicPr>
+        <p:blipFill>
+          <a:blip r:embed="rId3"/>
+          <a:stretch>
+            <a:fillRect/>
+          </a:stretch>
+        </p:blipFill>
+        <p:spPr>
+          <a:xfrm>
+            <a:off x="5398119" y="1005840"/>
+            <a:ext cx="6351921" cy="1756537"/>
+          </a:xfrm>
+          <a:prstGeom prst="roundRect">
+            <a:avLst>
+              <a:gd name="adj" fmla="val 16667"/>
+            </a:avLst>
+          </a:prstGeom>
+          <a:ln>
+            <a:noFill/>
+          </a:ln>
+          <a:effectLst>
+            <a:outerShdw blurRad="76200" dist="38100" dir="7800000" algn="tl" rotWithShape="0">
+              <a:srgbClr val="000000">
+                <a:alpha val="40000"/>
+              </a:srgbClr>
+            </a:outerShdw>
+          </a:effectLst>
+          <a:scene3d>
+            <a:camera prst="orthographicFront"/>
+            <a:lightRig rig="contrasting" dir="t">
+              <a:rot lat="0" lon="0" rev="4200000"/>
+            </a:lightRig>
+          </a:scene3d>
+          <a:sp3d prstMaterial="plastic">
+            <a:bevelT w="381000" h="114300" prst="relaxedInset"/>
+            <a:contourClr>
+              <a:srgbClr val="969696"/>
+            </a:contourClr>
+          </a:sp3d>
+        </p:spPr>
+      </p:pic>
     </p:spTree>
   </p:cSld>
   <p:clrMapOvr>
@@ -11216,7 +11451,7 @@
               </a:spcAft>
             </a:pPr>
             <a:r>
-              <a:rPr sz="1400" b="0" i="1">
+              <a:rPr sz="1400" b="0" i="1" dirty="0">
                 <a:solidFill>
                   <a:srgbClr val="4285F4"/>
                 </a:solidFill>
@@ -11244,7 +11479,7 @@
             </a:avLst>
           </a:prstGeom>
           <a:solidFill>
-            <a:srgbClr val="F2F5FA"/>
+            <a:schemeClr val="bg1"/>
           </a:solidFill>
           <a:ln>
             <a:noFill/>
@@ -11426,7 +11661,7 @@
             </a:avLst>
           </a:prstGeom>
           <a:solidFill>
-            <a:srgbClr val="F2F5FA"/>
+            <a:schemeClr val="bg1"/>
           </a:solidFill>
           <a:ln>
             <a:noFill/>
@@ -11608,7 +11843,7 @@
             </a:avLst>
           </a:prstGeom>
           <a:solidFill>
-            <a:srgbClr val="F2F5FA"/>
+            <a:schemeClr val="bg1"/>
           </a:solidFill>
           <a:ln>
             <a:noFill/>
@@ -11814,14 +12049,20 @@
       </p:sp>
       <p:sp>
         <p:nvSpPr>
-          <p:cNvPr id="19" name="TextBox 18"/>
+          <p:cNvPr id="20" name="TextBox 19">
+            <a:extLst>
+              <a:ext uri="{FF2B5EF4-FFF2-40B4-BE49-F238E27FC236}">
+                <a16:creationId xmlns:a16="http://schemas.microsoft.com/office/drawing/2014/main" id="{9D7562BC-F36C-23A9-9C7A-DC138D5D9988}"/>
+              </a:ext>
+            </a:extLst>
+          </p:cNvPr>
           <p:cNvSpPr txBox="1"/>
           <p:nvPr/>
         </p:nvSpPr>
         <p:spPr>
           <a:xfrm>
-            <a:off x="10698480" y="6446520"/>
-            <a:ext cx="1554480" cy="274320"/>
+            <a:off x="10561320" y="6620256"/>
+            <a:ext cx="1554480" cy="153888"/>
           </a:xfrm>
           <a:prstGeom prst="rect">
             <a:avLst/>
@@ -11840,17 +12081,80 @@
               </a:spcAft>
             </a:pPr>
             <a:r>
-              <a:rPr sz="1000" b="0" i="0">
+              <a:rPr lang="en-US" sz="1000" b="0" i="0" dirty="0">
                 <a:solidFill>
                   <a:srgbClr val="8C96A8"/>
                 </a:solidFill>
                 <a:latin typeface="Roboto"/>
               </a:rPr>
-              <a:t>8 / 10</a:t>
-            </a:r>
-          </a:p>
-        </p:txBody>
-      </p:sp>
+              <a:t>8</a:t>
+            </a:r>
+            <a:r>
+              <a:rPr sz="1000" b="0" i="0" dirty="0">
+                <a:solidFill>
+                  <a:srgbClr val="8C96A8"/>
+                </a:solidFill>
+                <a:latin typeface="Roboto"/>
+              </a:rPr>
+              <a:t> / 10</a:t>
+            </a:r>
+          </a:p>
+        </p:txBody>
+      </p:sp>
+      <p:pic>
+        <p:nvPicPr>
+          <p:cNvPr id="19" name="Picture 18">
+            <a:extLst>
+              <a:ext uri="{FF2B5EF4-FFF2-40B4-BE49-F238E27FC236}">
+                <a16:creationId xmlns:a16="http://schemas.microsoft.com/office/drawing/2014/main" id="{13BED0A4-3103-BEC9-2E5F-60CB3C5CACF4}"/>
+              </a:ext>
+            </a:extLst>
+          </p:cNvPr>
+          <p:cNvPicPr>
+            <a:picLocks noChangeAspect="1"/>
+          </p:cNvPicPr>
+          <p:nvPr/>
+        </p:nvPicPr>
+        <p:blipFill>
+          <a:blip r:embed="rId3"/>
+          <a:stretch>
+            <a:fillRect/>
+          </a:stretch>
+        </p:blipFill>
+        <p:spPr>
+          <a:xfrm>
+            <a:off x="6720840" y="814395"/>
+            <a:ext cx="4002607" cy="2075109"/>
+          </a:xfrm>
+          <a:prstGeom prst="roundRect">
+            <a:avLst>
+              <a:gd name="adj" fmla="val 16667"/>
+            </a:avLst>
+          </a:prstGeom>
+          <a:ln>
+            <a:noFill/>
+          </a:ln>
+          <a:effectLst>
+            <a:outerShdw blurRad="152400" dist="12000" dir="900000" sy="98000" kx="110000" ky="200000" algn="tl" rotWithShape="0">
+              <a:srgbClr val="000000">
+                <a:alpha val="30000"/>
+              </a:srgbClr>
+            </a:outerShdw>
+          </a:effectLst>
+          <a:scene3d>
+            <a:camera prst="perspectiveRelaxed">
+              <a:rot lat="19800000" lon="1200000" rev="20820000"/>
+            </a:camera>
+            <a:lightRig rig="threePt" dir="t"/>
+          </a:scene3d>
+          <a:sp3d contourW="6350" prstMaterial="matte">
+            <a:bevelT w="101600" h="101600"/>
+            <a:contourClr>
+              <a:srgbClr val="969696"/>
+            </a:contourClr>
+          </a:sp3d>
+        </p:spPr>
+      </p:pic>
     </p:spTree>
   </p:cSld>
   <p:clrMapOvr>
@@ -11979,7 +12283,7 @@
             </a:avLst>
           </a:prstGeom>
           <a:solidFill>
-            <a:srgbClr val="E6EAF0"/>
+            <a:schemeClr val="bg1"/>
           </a:solidFill>
           <a:ln>
             <a:noFill/>
@@ -12502,8 +12806,8 @@
         </p:nvSpPr>
         <p:spPr>
           <a:xfrm>
-            <a:off x="6263640" y="1554480"/>
-            <a:ext cx="70000" cy="4572000"/>
+            <a:off x="6263640" y="1920240"/>
+            <a:ext cx="91440" cy="3797935"/>
           </a:xfrm>
           <a:prstGeom prst="roundRect">
             <a:avLst>
@@ -12594,7 +12898,7 @@
         </p:nvSpPr>
         <p:spPr>
           <a:xfrm>
-            <a:off x="6583680" y="2286000"/>
+            <a:off x="6583680" y="2354580"/>
             <a:ext cx="228600" cy="228600"/>
           </a:xfrm>
           <a:prstGeom prst="ellipse">
@@ -12684,7 +12988,7 @@
         </p:nvSpPr>
         <p:spPr>
           <a:xfrm>
-            <a:off x="6583680" y="2971800"/>
+            <a:off x="6583680" y="3040380"/>
             <a:ext cx="228600" cy="228600"/>
           </a:xfrm>
           <a:prstGeom prst="ellipse">
@@ -12774,7 +13078,7 @@
         </p:nvSpPr>
         <p:spPr>
           <a:xfrm>
-            <a:off x="6583680" y="3657600"/>
+            <a:off x="6583680" y="3703320"/>
             <a:ext cx="228600" cy="228600"/>
           </a:xfrm>
           <a:prstGeom prst="ellipse">
@@ -12864,7 +13168,7 @@
         </p:nvSpPr>
         <p:spPr>
           <a:xfrm>
-            <a:off x="6583680" y="4343400"/>
+            <a:off x="6583680" y="4411980"/>
             <a:ext cx="228600" cy="228600"/>
           </a:xfrm>
           <a:prstGeom prst="ellipse">
@@ -12954,7 +13258,7 @@
         </p:nvSpPr>
         <p:spPr>
           <a:xfrm>
-            <a:off x="6583680" y="5029200"/>
+            <a:off x="6583680" y="5097780"/>
             <a:ext cx="228600" cy="228600"/>
           </a:xfrm>
           <a:prstGeom prst="ellipse">
@@ -13077,14 +13381,20 @@
       </p:sp>
       <p:sp>
         <p:nvSpPr>
-          <p:cNvPr id="29" name="TextBox 28"/>
+          <p:cNvPr id="30" name="TextBox 29">
+            <a:extLst>
+              <a:ext uri="{FF2B5EF4-FFF2-40B4-BE49-F238E27FC236}">
+                <a16:creationId xmlns:a16="http://schemas.microsoft.com/office/drawing/2014/main" id="{6151CB2B-DCBE-A13F-35DD-5FF2DBBAA177}"/>
+              </a:ext>
+            </a:extLst>
+          </p:cNvPr>
           <p:cNvSpPr txBox="1"/>
           <p:nvPr/>
         </p:nvSpPr>
         <p:spPr>
           <a:xfrm>
-            <a:off x="10698480" y="6446520"/>
-            <a:ext cx="1554480" cy="274320"/>
+            <a:off x="10561320" y="6620256"/>
+            <a:ext cx="1554480" cy="153888"/>
           </a:xfrm>
           <a:prstGeom prst="rect">
             <a:avLst/>
@@ -13103,13 +13413,22 @@
               </a:spcAft>
             </a:pPr>
             <a:r>
-              <a:rPr sz="1000" b="0" i="0">
+              <a:rPr lang="en-US" sz="1000" dirty="0">
                 <a:solidFill>
                   <a:srgbClr val="8C96A8"/>
                 </a:solidFill>
                 <a:latin typeface="Roboto"/>
               </a:rPr>
-              <a:t>9 / 10</a:t>
+              <a:t>9</a:t>
+            </a:r>
+            <a:r>
+              <a:rPr sz="1000" b="0" i="0" dirty="0">
+                <a:solidFill>
+                  <a:srgbClr val="8C96A8"/>
+                </a:solidFill>
+                <a:latin typeface="Roboto"/>
+              </a:rPr>
+              <a:t> / 10</a:t>
             </a:r>
           </a:p>
         </p:txBody>

--- a/deliverables/Spatial_Audio_Presentation.pptx
+++ b/deliverables/Spatial_Audio_Presentation.pptx
@@ -4889,15 +4889,28 @@
             <a:r>
               <a:rPr lang="en-US" sz="1400" b="0" i="1" dirty="0">
                 <a:solidFill>
-                  <a:srgbClr val="4285F4"/>
+                  <a:schemeClr val="tx2">
+                    <a:lumMod val="60000"/>
+                    <a:lumOff val="40000"/>
+                  </a:schemeClr>
                 </a:solidFill>
                 <a:latin typeface="Roboto"/>
-              </a:rPr>
-              <a:t>https://vanowarna.com/spatial-audio-and-high-fidelity-streaming/</a:t>
+                <a:hlinkClick r:id="rId3">
+                  <a:extLst>
+                    <a:ext uri="{A12FA001-AC4F-418D-AE19-62706E023703}">
+                      <ahyp:hlinkClr xmlns:ahyp="http://schemas.microsoft.com/office/drawing/2018/hyperlinkcolor" val="tx"/>
+                    </a:ext>
+                  </a:extLst>
+                </a:hlinkClick>
+              </a:rPr>
+              <a:t>Visit the Online tool here</a:t>
             </a:r>
             <a:endParaRPr sz="1400" b="0" i="1" dirty="0">
               <a:solidFill>
-                <a:srgbClr val="4285F4"/>
+                <a:schemeClr val="tx2">
+                  <a:lumMod val="60000"/>
+                  <a:lumOff val="40000"/>
+                </a:schemeClr>
               </a:solidFill>
               <a:latin typeface="Roboto"/>
             </a:endParaRPr>
